--- a/DSA3_Project_Presentation.pptx
+++ b/DSA3_Project_Presentation.pptx
@@ -270,7 +270,7 @@
           <a:p>
             <a:fld id="{45B1BC09-D557-492E-9C5D-E4CF9E078DE2}" type="datetimeFigureOut">
               <a:rPr lang="en-US" smtClean="0"/>
-              <a:t>10/7/2026</a:t>
+              <a:t>10/9/2026</a:t>
             </a:fld>
             <a:endParaRPr lang="en-US"/>
           </a:p>
@@ -473,7 +473,7 @@
           <a:p>
             <a:fld id="{45B1BC09-D557-492E-9C5D-E4CF9E078DE2}" type="datetimeFigureOut">
               <a:rPr lang="en-US" smtClean="0"/>
-              <a:t>10/7/2026</a:t>
+              <a:t>10/9/2026</a:t>
             </a:fld>
             <a:endParaRPr lang="en-US"/>
           </a:p>
@@ -676,7 +676,7 @@
           <a:p>
             <a:fld id="{45B1BC09-D557-492E-9C5D-E4CF9E078DE2}" type="datetimeFigureOut">
               <a:rPr lang="en-US" smtClean="0"/>
-              <a:t>10/7/2026</a:t>
+              <a:t>10/9/2026</a:t>
             </a:fld>
             <a:endParaRPr lang="en-US"/>
           </a:p>
@@ -879,7 +879,7 @@
           <a:p>
             <a:fld id="{45B1BC09-D557-492E-9C5D-E4CF9E078DE2}" type="datetimeFigureOut">
               <a:rPr lang="en-US" smtClean="0"/>
-              <a:t>10/7/2026</a:t>
+              <a:t>10/9/2026</a:t>
             </a:fld>
             <a:endParaRPr lang="en-US"/>
           </a:p>
@@ -1149,7 +1149,7 @@
           <a:p>
             <a:fld id="{45B1BC09-D557-492E-9C5D-E4CF9E078DE2}" type="datetimeFigureOut">
               <a:rPr lang="en-US" smtClean="0"/>
-              <a:t>10/7/2026</a:t>
+              <a:t>10/9/2026</a:t>
             </a:fld>
             <a:endParaRPr lang="en-US"/>
           </a:p>
@@ -1411,7 +1411,7 @@
           <a:p>
             <a:fld id="{45B1BC09-D557-492E-9C5D-E4CF9E078DE2}" type="datetimeFigureOut">
               <a:rPr lang="en-US" smtClean="0"/>
-              <a:t>10/7/2026</a:t>
+              <a:t>10/9/2026</a:t>
             </a:fld>
             <a:endParaRPr lang="en-US"/>
           </a:p>
@@ -1809,7 +1809,7 @@
           <a:p>
             <a:fld id="{45B1BC09-D557-492E-9C5D-E4CF9E078DE2}" type="datetimeFigureOut">
               <a:rPr lang="en-US" smtClean="0"/>
-              <a:t>10/7/2026</a:t>
+              <a:t>10/9/2026</a:t>
             </a:fld>
             <a:endParaRPr lang="en-US"/>
           </a:p>
@@ -1953,7 +1953,7 @@
           <a:p>
             <a:fld id="{45B1BC09-D557-492E-9C5D-E4CF9E078DE2}" type="datetimeFigureOut">
               <a:rPr lang="en-US" smtClean="0"/>
-              <a:t>10/7/2026</a:t>
+              <a:t>10/9/2026</a:t>
             </a:fld>
             <a:endParaRPr lang="en-US"/>
           </a:p>
@@ -2067,7 +2067,7 @@
           <a:p>
             <a:fld id="{45B1BC09-D557-492E-9C5D-E4CF9E078DE2}" type="datetimeFigureOut">
               <a:rPr lang="en-US" smtClean="0"/>
-              <a:t>10/7/2026</a:t>
+              <a:t>10/9/2026</a:t>
             </a:fld>
             <a:endParaRPr lang="en-US"/>
           </a:p>
@@ -2370,7 +2370,7 @@
           <a:p>
             <a:fld id="{45B1BC09-D557-492E-9C5D-E4CF9E078DE2}" type="datetimeFigureOut">
               <a:rPr lang="en-US" smtClean="0"/>
-              <a:t>10/7/2026</a:t>
+              <a:t>10/9/2026</a:t>
             </a:fld>
             <a:endParaRPr lang="en-US"/>
           </a:p>
@@ -2650,7 +2650,7 @@
           <a:p>
             <a:fld id="{45B1BC09-D557-492E-9C5D-E4CF9E078DE2}" type="datetimeFigureOut">
               <a:rPr lang="en-US" smtClean="0"/>
-              <a:t>10/7/2026</a:t>
+              <a:t>10/9/2026</a:t>
             </a:fld>
             <a:endParaRPr lang="en-US"/>
           </a:p>
